--- a/dist/초3/음악·미술/음악표현/초3_음악·미술_음악표현_01_박과리듬_학생용.pptx
+++ b/dist/초3/음악·미술/음악표현/초3_음악·미술_음악표현_01_박과리듬_학생용.pptx
@@ -114,30 +114,30 @@
   <p:extLst>
     <p:ext uri="{521415D9-36F7-43E2-AB2F-B90AF26B5E84}">
       <p14:sectionLst xmlns:p14="http://schemas.microsoft.com/office/powerpoint/2010/main">
-        <p14:section name="도입" id="{64e4a55e-a7ce-c85c-eba2-3cd5199301fa}">
+        <p14:section name="도입" id="{e2cf8156-d542-a746-d1e4-44cb53aa78c0}">
           <p14:sldIdLst>
             <p14:sldId id="256"/>
           </p14:sldIdLst>
         </p14:section>
-        <p14:section name="개념" id="{9cf43cd5-79f3-f54c-bd15-ba1b5e6f09f5}">
+        <p14:section name="개념" id="{01b9a3f3-48b6-53dc-3688-67e5e3b20350}">
           <p14:sldIdLst>
             <p14:sldId id="257"/>
             <p14:sldId id="258"/>
             <p14:sldId id="259"/>
           </p14:sldIdLst>
         </p14:section>
-        <p14:section name="연습" id="{557e3e5d-211a-bcf0-dd95-b8857f65ee24}">
+        <p14:section name="연습" id="{48e6d991-7c2b-9ca4-ccc5-5f1ff73f9a0d}">
           <p14:sldIdLst>
             <p14:sldId id="260"/>
             <p14:sldId id="261"/>
           </p14:sldIdLst>
         </p14:section>
-        <p14:section name="확인" id="{fb2f1cfc-6c78-a16c-be26-f5caa92f9c51}">
+        <p14:section name="확인" id="{5b48738d-a9b0-4ab5-22b9-bf6a7986e998}">
           <p14:sldIdLst>
             <p14:sldId id="262"/>
           </p14:sldIdLst>
         </p14:section>
-        <p14:section name="정리" id="{98036377-457f-639c-9d67-a1d08c4780b9}">
+        <p14:section name="정리" id="{f4587eed-a342-2f39-60b0-fa4b8bf7808a}">
           <p14:sldIdLst>
             <p14:sldId id="263"/>
           </p14:sldIdLst>
@@ -2241,7 +2241,7 @@
           <a:bodyPr wrap="square" lIns="0" tIns="0" rIns="0" bIns="0" rtlCol="0" anchor="ctr"/>
           <a:lstStyle/>
           <a:p>
-            <a:pPr algn="l" indent="0" marL="0">
+            <a:pPr eaLnBrk="0" algn="l" indent="0" marL="0">
               <a:buNone/>
             </a:pPr>
             <a:r>
@@ -2282,7 +2282,7 @@
           <a:bodyPr wrap="square" lIns="0" tIns="0" rIns="0" bIns="0" rtlCol="0" anchor="t"/>
           <a:lstStyle/>
           <a:p>
-            <a:pPr indent="0" marL="0">
+            <a:pPr eaLnBrk="0" indent="0" marL="0">
               <a:buNone/>
             </a:pPr>
             <a:r>
@@ -2334,7 +2334,7 @@
                     <a:bodyPr/>
                     <a:lstStyle/>
                     <a:p>
-                      <a:pPr algn="ctr" indent="0" marL="0">
+                      <a:pPr eaLnBrk="0" algn="ctr" indent="0" marL="0">
                         <a:buNone/>
                       </a:pPr>
                       <a:r>
@@ -2402,7 +2402,7 @@
                     <a:bodyPr/>
                     <a:lstStyle/>
                     <a:p>
-                      <a:pPr algn="ctr" indent="0" marL="0">
+                      <a:pPr eaLnBrk="0" algn="ctr" indent="0" marL="0">
                         <a:buNone/>
                       </a:pPr>
                       <a:r>
@@ -2470,7 +2470,7 @@
                     <a:bodyPr/>
                     <a:lstStyle/>
                     <a:p>
-                      <a:pPr algn="ctr" indent="0" marL="0">
+                      <a:pPr eaLnBrk="0" algn="ctr" indent="0" marL="0">
                         <a:buNone/>
                       </a:pPr>
                       <a:r>
@@ -2538,7 +2538,7 @@
                     <a:bodyPr/>
                     <a:lstStyle/>
                     <a:p>
-                      <a:pPr algn="ctr" indent="0" marL="0">
+                      <a:pPr eaLnBrk="0" algn="ctr" indent="0" marL="0">
                         <a:buNone/>
                       </a:pPr>
                       <a:r>
@@ -2608,7 +2608,7 @@
                     <a:bodyPr/>
                     <a:lstStyle/>
                     <a:p>
-                      <a:pPr algn="ctr" indent="0" marL="0">
+                      <a:pPr eaLnBrk="0" algn="ctr" indent="0" marL="0">
                         <a:buNone/>
                       </a:pPr>
                       <a:r>
@@ -2676,7 +2676,7 @@
                     <a:bodyPr/>
                     <a:lstStyle/>
                     <a:p>
-                      <a:pPr algn="ctr" indent="0" marL="0">
+                      <a:pPr eaLnBrk="0" algn="ctr" indent="0" marL="0">
                         <a:buNone/>
                       </a:pPr>
                       <a:r>
@@ -2744,7 +2744,7 @@
                     <a:bodyPr/>
                     <a:lstStyle/>
                     <a:p>
-                      <a:pPr algn="ctr" indent="0" marL="0">
+                      <a:pPr eaLnBrk="0" algn="ctr" indent="0" marL="0">
                         <a:buNone/>
                       </a:pPr>
                       <a:r>
@@ -2812,7 +2812,7 @@
                     <a:bodyPr/>
                     <a:lstStyle/>
                     <a:p>
-                      <a:pPr algn="ctr" indent="0" marL="0">
+                      <a:pPr eaLnBrk="0" algn="ctr" indent="0" marL="0">
                         <a:buNone/>
                       </a:pPr>
                       <a:r>
@@ -2928,7 +2928,7 @@
           <a:bodyPr wrap="square" lIns="0" tIns="0" rIns="0" bIns="0" rtlCol="0" anchor="ctr"/>
           <a:lstStyle/>
           <a:p>
-            <a:pPr indent="0" marL="0">
+            <a:pPr eaLnBrk="0" indent="0" marL="0">
               <a:spcAft>
                 <a:spcPts val="600"/>
               </a:spcAft>
@@ -2948,7 +2948,7 @@
             <a:endParaRPr lang="ko-KR" sz="3000" dirty="0"/>
           </a:p>
           <a:p>
-            <a:pPr indent="0" marL="0">
+            <a:pPr eaLnBrk="0" indent="0" marL="0">
               <a:spcAft>
                 <a:spcPts val="600"/>
               </a:spcAft>
@@ -2968,7 +2968,7 @@
             <a:endParaRPr lang="ko-KR" sz="3000" dirty="0"/>
           </a:p>
           <a:p>
-            <a:pPr indent="0" marL="0">
+            <a:pPr eaLnBrk="0" indent="0" marL="0">
               <a:spcAft>
                 <a:spcPts val="600"/>
               </a:spcAft>
@@ -3037,7 +3037,7 @@
           <a:bodyPr wrap="square" lIns="0" tIns="0" rIns="0" bIns="0" rtlCol="0" anchor="ctr"/>
           <a:lstStyle/>
           <a:p>
-            <a:pPr algn="l" indent="0" marL="0">
+            <a:pPr eaLnBrk="0" algn="l" indent="0" marL="0">
               <a:buNone/>
             </a:pPr>
             <a:r>
@@ -3103,7 +3103,7 @@
           <a:bodyPr wrap="square" lIns="0" tIns="0" rIns="0" bIns="0" rtlCol="0" anchor="ctr"/>
           <a:lstStyle/>
           <a:p>
-            <a:pPr indent="0" marL="0">
+            <a:pPr eaLnBrk="0" indent="0" marL="0">
               <a:spcAft>
                 <a:spcPts val="600"/>
               </a:spcAft>
@@ -3172,7 +3172,7 @@
           <a:bodyPr wrap="square" lIns="0" tIns="0" rIns="0" bIns="0" rtlCol="0" anchor="ctr"/>
           <a:lstStyle/>
           <a:p>
-            <a:pPr indent="0" marL="0">
+            <a:pPr eaLnBrk="0" indent="0" marL="0">
               <a:spcAft>
                 <a:spcPts val="600"/>
               </a:spcAft>
@@ -3192,7 +3192,7 @@
             <a:endParaRPr lang="ko-KR" sz="3000" dirty="0"/>
           </a:p>
           <a:p>
-            <a:pPr indent="0" marL="0">
+            <a:pPr eaLnBrk="0" indent="0" marL="0">
               <a:spcAft>
                 <a:spcPts val="600"/>
               </a:spcAft>
@@ -3261,7 +3261,7 @@
           <a:bodyPr wrap="square" lIns="0" tIns="0" rIns="0" bIns="0" rtlCol="0" anchor="ctr"/>
           <a:lstStyle/>
           <a:p>
-            <a:pPr indent="0" marL="0">
+            <a:pPr eaLnBrk="0" indent="0" marL="0">
               <a:spcAft>
                 <a:spcPts val="600"/>
               </a:spcAft>
@@ -3281,7 +3281,7 @@
             <a:endParaRPr lang="ko-KR" sz="3000" dirty="0"/>
           </a:p>
           <a:p>
-            <a:pPr indent="0" marL="0">
+            <a:pPr eaLnBrk="0" indent="0" marL="0">
               <a:spcAft>
                 <a:spcPts val="600"/>
               </a:spcAft>
@@ -3341,7 +3341,7 @@
             </a:lvl1pPr>
           </a:lstStyle>
           <a:p>
-            <a:pPr algn="r"/>
+            <a:pPr eaLnBrk="0" algn="r"/>
             <a:fld id="{F7021451-1387-4CA6-816F-3879F97B5CBC}" type="slidenum">
               <a:rPr b="0" lang="en-US"/>
               <a:t>2</a:t>
@@ -3398,7 +3398,7 @@
           <a:bodyPr wrap="square" lIns="0" tIns="0" rIns="0" bIns="0" rtlCol="0" anchor="ctr"/>
           <a:lstStyle/>
           <a:p>
-            <a:pPr algn="l" indent="0" marL="0">
+            <a:pPr eaLnBrk="0" algn="l" indent="0" marL="0">
               <a:buNone/>
             </a:pPr>
             <a:r>
@@ -3437,7 +3437,7 @@
           <a:bodyPr wrap="square" lIns="0" tIns="0" rIns="0" bIns="0" rtlCol="0" anchor="ctr"/>
           <a:lstStyle/>
           <a:p>
-            <a:pPr algn="l" indent="0" marL="0">
+            <a:pPr eaLnBrk="0" algn="l" indent="0" marL="0">
               <a:buNone/>
             </a:pPr>
             <a:r>
@@ -3503,7 +3503,7 @@
           <a:bodyPr wrap="square" lIns="0" tIns="0" rIns="0" bIns="0" rtlCol="0" anchor="ctr"/>
           <a:lstStyle/>
           <a:p>
-            <a:pPr indent="0" marL="0">
+            <a:pPr eaLnBrk="0" indent="0" marL="0">
               <a:spcAft>
                 <a:spcPts val="600"/>
               </a:spcAft>
@@ -3523,7 +3523,7 @@
             <a:endParaRPr lang="ko-KR" sz="3000" dirty="0"/>
           </a:p>
           <a:p>
-            <a:pPr indent="0" marL="0">
+            <a:pPr eaLnBrk="0" indent="0" marL="0">
               <a:spcAft>
                 <a:spcPts val="600"/>
               </a:spcAft>
@@ -3543,7 +3543,7 @@
             <a:endParaRPr lang="ko-KR" sz="3000" dirty="0"/>
           </a:p>
           <a:p>
-            <a:pPr indent="0" marL="0">
+            <a:pPr eaLnBrk="0" indent="0" marL="0">
               <a:spcAft>
                 <a:spcPts val="600"/>
               </a:spcAft>
@@ -3591,7 +3591,7 @@
           <a:bodyPr wrap="square" lIns="0" tIns="0" rIns="0" bIns="0" rtlCol="0" anchor="ctr"/>
           <a:lstStyle/>
           <a:p>
-            <a:pPr algn="ctr" indent="0" marL="0">
+            <a:pPr eaLnBrk="0" algn="ctr" indent="0" marL="0">
               <a:buNone/>
             </a:pPr>
             <a:r>
@@ -3630,7 +3630,7 @@
           <a:bodyPr wrap="square" lIns="0" tIns="0" rIns="0" bIns="0" rtlCol="0" anchor="t"/>
           <a:lstStyle/>
           <a:p>
-            <a:pPr algn="l" indent="0" marL="0">
+            <a:pPr eaLnBrk="0" algn="l" indent="0" marL="0">
               <a:buNone/>
             </a:pPr>
             <a:r>
@@ -3675,7 +3675,7 @@
           <a:bodyPr wrap="square" lIns="0" tIns="0" rIns="0" bIns="0" rtlCol="0" anchor="ctr"/>
           <a:lstStyle/>
           <a:p>
-            <a:pPr algn="ctr" indent="0" marL="0">
+            <a:pPr eaLnBrk="0" algn="ctr" indent="0" marL="0">
               <a:buNone/>
             </a:pPr>
             <a:r>
@@ -3714,7 +3714,7 @@
           <a:bodyPr wrap="square" lIns="0" tIns="0" rIns="0" bIns="0" rtlCol="0" anchor="t"/>
           <a:lstStyle/>
           <a:p>
-            <a:pPr algn="l" indent="0" marL="0">
+            <a:pPr eaLnBrk="0" algn="l" indent="0" marL="0">
               <a:buNone/>
             </a:pPr>
             <a:r>
@@ -3759,7 +3759,7 @@
           <a:bodyPr wrap="square" lIns="0" tIns="0" rIns="0" bIns="0" rtlCol="0" anchor="ctr"/>
           <a:lstStyle/>
           <a:p>
-            <a:pPr algn="ctr" indent="0" marL="0">
+            <a:pPr eaLnBrk="0" algn="ctr" indent="0" marL="0">
               <a:buNone/>
             </a:pPr>
             <a:r>
@@ -3798,7 +3798,7 @@
           <a:bodyPr wrap="square" lIns="0" tIns="0" rIns="0" bIns="0" rtlCol="0" anchor="t"/>
           <a:lstStyle/>
           <a:p>
-            <a:pPr algn="l" indent="0" marL="0">
+            <a:pPr eaLnBrk="0" algn="l" indent="0" marL="0">
               <a:buNone/>
             </a:pPr>
             <a:r>
@@ -3855,7 +3855,7 @@
             </a:lvl1pPr>
           </a:lstStyle>
           <a:p>
-            <a:pPr algn="r"/>
+            <a:pPr eaLnBrk="0" algn="r"/>
             <a:fld id="{F7021451-1387-4CA6-816F-3879F97B5CBC}" type="slidenum">
               <a:rPr b="0" lang="en-US"/>
               <a:t>3</a:t>
@@ -3912,7 +3912,7 @@
           <a:bodyPr wrap="square" lIns="0" tIns="0" rIns="0" bIns="0" rtlCol="0" anchor="ctr"/>
           <a:lstStyle/>
           <a:p>
-            <a:pPr algn="l" indent="0" marL="0">
+            <a:pPr eaLnBrk="0" algn="l" indent="0" marL="0">
               <a:buNone/>
             </a:pPr>
             <a:r>
@@ -3951,7 +3951,7 @@
           <a:bodyPr wrap="square" lIns="0" tIns="0" rIns="0" bIns="0" rtlCol="0" anchor="ctr"/>
           <a:lstStyle/>
           <a:p>
-            <a:pPr algn="l" indent="0" marL="0">
+            <a:pPr eaLnBrk="0" algn="l" indent="0" marL="0">
               <a:buNone/>
             </a:pPr>
             <a:r>
@@ -4017,7 +4017,7 @@
           <a:bodyPr wrap="square" lIns="0" tIns="0" rIns="0" bIns="0" rtlCol="0" anchor="ctr"/>
           <a:lstStyle/>
           <a:p>
-            <a:pPr indent="0" marL="0">
+            <a:pPr eaLnBrk="0" indent="0" marL="0">
               <a:spcAft>
                 <a:spcPts val="600"/>
               </a:spcAft>
@@ -4072,7 +4072,7 @@
                     <a:bodyPr/>
                     <a:lstStyle/>
                     <a:p>
-                      <a:pPr algn="ctr" indent="0" marL="0">
+                      <a:pPr eaLnBrk="0" algn="ctr" indent="0" marL="0">
                         <a:buNone/>
                       </a:pPr>
                       <a:r>
@@ -4140,7 +4140,7 @@
                     <a:bodyPr/>
                     <a:lstStyle/>
                     <a:p>
-                      <a:pPr algn="ctr" indent="0" marL="0">
+                      <a:pPr eaLnBrk="0" algn="ctr" indent="0" marL="0">
                         <a:buNone/>
                       </a:pPr>
                       <a:r>
@@ -4208,7 +4208,7 @@
                     <a:bodyPr/>
                     <a:lstStyle/>
                     <a:p>
-                      <a:pPr algn="ctr" indent="0" marL="0">
+                      <a:pPr eaLnBrk="0" algn="ctr" indent="0" marL="0">
                         <a:buNone/>
                       </a:pPr>
                       <a:r>
@@ -4276,7 +4276,7 @@
                     <a:bodyPr/>
                     <a:lstStyle/>
                     <a:p>
-                      <a:pPr algn="ctr" indent="0" marL="0">
+                      <a:pPr eaLnBrk="0" algn="ctr" indent="0" marL="0">
                         <a:buNone/>
                       </a:pPr>
                       <a:r>
@@ -4346,7 +4346,7 @@
                     <a:bodyPr/>
                     <a:lstStyle/>
                     <a:p>
-                      <a:pPr algn="ctr" indent="0" marL="0">
+                      <a:pPr eaLnBrk="0" algn="ctr" indent="0" marL="0">
                         <a:buNone/>
                       </a:pPr>
                       <a:r>
@@ -4414,7 +4414,7 @@
                     <a:bodyPr/>
                     <a:lstStyle/>
                     <a:p>
-                      <a:pPr algn="ctr" indent="0" marL="0">
+                      <a:pPr eaLnBrk="0" algn="ctr" indent="0" marL="0">
                         <a:buNone/>
                       </a:pPr>
                       <a:r>
@@ -4482,7 +4482,7 @@
                     <a:bodyPr/>
                     <a:lstStyle/>
                     <a:p>
-                      <a:pPr algn="ctr" indent="0" marL="0">
+                      <a:pPr eaLnBrk="0" algn="ctr" indent="0" marL="0">
                         <a:buNone/>
                       </a:pPr>
                       <a:r>
@@ -4550,7 +4550,7 @@
                     <a:bodyPr/>
                     <a:lstStyle/>
                     <a:p>
-                      <a:pPr algn="ctr" indent="0" marL="0">
+                      <a:pPr eaLnBrk="0" algn="ctr" indent="0" marL="0">
                         <a:buNone/>
                       </a:pPr>
                       <a:r>
@@ -4657,7 +4657,7 @@
             </a:lvl1pPr>
           </a:lstStyle>
           <a:p>
-            <a:pPr algn="r"/>
+            <a:pPr eaLnBrk="0" algn="r"/>
             <a:fld id="{F7021451-1387-4CA6-816F-3879F97B5CBC}" type="slidenum">
               <a:rPr b="0" lang="en-US"/>
               <a:t>4</a:t>
@@ -4714,7 +4714,7 @@
           <a:bodyPr wrap="square" lIns="0" tIns="0" rIns="0" bIns="0" rtlCol="0" anchor="ctr"/>
           <a:lstStyle/>
           <a:p>
-            <a:pPr algn="l" indent="0" marL="0">
+            <a:pPr eaLnBrk="0" algn="l" indent="0" marL="0">
               <a:buNone/>
             </a:pPr>
             <a:r>
@@ -4753,7 +4753,7 @@
           <a:bodyPr wrap="square" lIns="0" tIns="0" rIns="0" bIns="0" rtlCol="0" anchor="ctr"/>
           <a:lstStyle/>
           <a:p>
-            <a:pPr algn="l" indent="0" marL="0">
+            <a:pPr eaLnBrk="0" algn="l" indent="0" marL="0">
               <a:buNone/>
             </a:pPr>
             <a:r>
@@ -4819,7 +4819,7 @@
           <a:bodyPr wrap="square" lIns="0" tIns="0" rIns="0" bIns="0" rtlCol="0" anchor="ctr"/>
           <a:lstStyle/>
           <a:p>
-            <a:pPr indent="0" marL="0">
+            <a:pPr eaLnBrk="0" indent="0" marL="0">
               <a:spcAft>
                 <a:spcPts val="600"/>
               </a:spcAft>
@@ -4869,7 +4869,7 @@
           <a:bodyPr wrap="square" lIns="0" tIns="0" rIns="0" bIns="0" rtlCol="0" anchor="ctr"/>
           <a:lstStyle/>
           <a:p>
-            <a:pPr algn="ctr" indent="0" marL="0">
+            <a:pPr eaLnBrk="0" algn="ctr" indent="0" marL="0">
               <a:buNone/>
             </a:pPr>
             <a:r>
@@ -4921,7 +4921,7 @@
                     <a:bodyPr/>
                     <a:lstStyle/>
                     <a:p>
-                      <a:pPr algn="ctr" indent="0" marL="0">
+                      <a:pPr eaLnBrk="0" algn="ctr" indent="0" marL="0">
                         <a:buNone/>
                       </a:pPr>
                       <a:r>
@@ -4989,7 +4989,7 @@
                     <a:bodyPr/>
                     <a:lstStyle/>
                     <a:p>
-                      <a:pPr algn="ctr" indent="0" marL="0">
+                      <a:pPr eaLnBrk="0" algn="ctr" indent="0" marL="0">
                         <a:buNone/>
                       </a:pPr>
                       <a:r>
@@ -5057,7 +5057,7 @@
                     <a:bodyPr/>
                     <a:lstStyle/>
                     <a:p>
-                      <a:pPr algn="ctr" indent="0" marL="0">
+                      <a:pPr eaLnBrk="0" algn="ctr" indent="0" marL="0">
                         <a:buNone/>
                       </a:pPr>
                       <a:r>
@@ -5125,7 +5125,7 @@
                     <a:bodyPr/>
                     <a:lstStyle/>
                     <a:p>
-                      <a:pPr algn="ctr" indent="0" marL="0">
+                      <a:pPr eaLnBrk="0" algn="ctr" indent="0" marL="0">
                         <a:buNone/>
                       </a:pPr>
                       <a:r>
@@ -5222,7 +5222,7 @@
           <a:bodyPr wrap="square" lIns="0" tIns="0" rIns="0" bIns="0" rtlCol="0" anchor="ctr"/>
           <a:lstStyle/>
           <a:p>
-            <a:pPr algn="ctr" indent="0" marL="0">
+            <a:pPr eaLnBrk="0" algn="ctr" indent="0" marL="0">
               <a:buNone/>
             </a:pPr>
             <a:r>
@@ -5274,7 +5274,7 @@
                     <a:bodyPr/>
                     <a:lstStyle/>
                     <a:p>
-                      <a:pPr algn="ctr" indent="0" marL="0">
+                      <a:pPr eaLnBrk="0" algn="ctr" indent="0" marL="0">
                         <a:buNone/>
                       </a:pPr>
                       <a:r>
@@ -5342,7 +5342,7 @@
                     <a:bodyPr/>
                     <a:lstStyle/>
                     <a:p>
-                      <a:pPr algn="ctr" indent="0" marL="0">
+                      <a:pPr eaLnBrk="0" algn="ctr" indent="0" marL="0">
                         <a:buNone/>
                       </a:pPr>
                       <a:r>
@@ -5410,7 +5410,7 @@
                     <a:bodyPr/>
                     <a:lstStyle/>
                     <a:p>
-                      <a:pPr algn="ctr" indent="0" marL="0">
+                      <a:pPr eaLnBrk="0" algn="ctr" indent="0" marL="0">
                         <a:buNone/>
                       </a:pPr>
                       <a:r>
@@ -5478,7 +5478,7 @@
                     <a:bodyPr/>
                     <a:lstStyle/>
                     <a:p>
-                      <a:pPr algn="ctr" indent="0" marL="0">
+                      <a:pPr eaLnBrk="0" algn="ctr" indent="0" marL="0">
                         <a:buNone/>
                       </a:pPr>
                       <a:r>
@@ -5575,7 +5575,7 @@
           <a:bodyPr wrap="square" lIns="0" tIns="0" rIns="0" bIns="0" rtlCol="0" anchor="ctr"/>
           <a:lstStyle/>
           <a:p>
-            <a:pPr algn="ctr" indent="0" marL="0">
+            <a:pPr eaLnBrk="0" algn="ctr" indent="0" marL="0">
               <a:buNone/>
             </a:pPr>
             <a:r>
@@ -5627,7 +5627,7 @@
                     <a:bodyPr/>
                     <a:lstStyle/>
                     <a:p>
-                      <a:pPr algn="ctr" indent="0" marL="0">
+                      <a:pPr eaLnBrk="0" algn="ctr" indent="0" marL="0">
                         <a:buNone/>
                       </a:pPr>
                       <a:r>
@@ -5695,7 +5695,7 @@
                     <a:bodyPr/>
                     <a:lstStyle/>
                     <a:p>
-                      <a:pPr algn="ctr" indent="0" marL="0">
+                      <a:pPr eaLnBrk="0" algn="ctr" indent="0" marL="0">
                         <a:buNone/>
                       </a:pPr>
                       <a:r>
@@ -5763,7 +5763,7 @@
                     <a:bodyPr/>
                     <a:lstStyle/>
                     <a:p>
-                      <a:pPr algn="ctr" indent="0" marL="0">
+                      <a:pPr eaLnBrk="0" algn="ctr" indent="0" marL="0">
                         <a:buNone/>
                       </a:pPr>
                       <a:r>
@@ -5831,7 +5831,7 @@
                     <a:bodyPr/>
                     <a:lstStyle/>
                     <a:p>
-                      <a:pPr algn="ctr" indent="0" marL="0">
+                      <a:pPr eaLnBrk="0" algn="ctr" indent="0" marL="0">
                         <a:buNone/>
                       </a:pPr>
                       <a:r>
@@ -5938,7 +5938,7 @@
             </a:lvl1pPr>
           </a:lstStyle>
           <a:p>
-            <a:pPr algn="r"/>
+            <a:pPr eaLnBrk="0" algn="r"/>
             <a:fld id="{F7021451-1387-4CA6-816F-3879F97B5CBC}" type="slidenum">
               <a:rPr b="0" lang="en-US"/>
               <a:t>5</a:t>
@@ -5995,7 +5995,7 @@
           <a:bodyPr wrap="square" lIns="0" tIns="0" rIns="0" bIns="0" rtlCol="0" anchor="ctr"/>
           <a:lstStyle/>
           <a:p>
-            <a:pPr algn="l" indent="0" marL="0">
+            <a:pPr eaLnBrk="0" algn="l" indent="0" marL="0">
               <a:buNone/>
             </a:pPr>
             <a:r>
@@ -6061,7 +6061,7 @@
           <a:bodyPr wrap="square" lIns="0" tIns="0" rIns="0" bIns="0" rtlCol="0" anchor="ctr"/>
           <a:lstStyle/>
           <a:p>
-            <a:pPr indent="0" marL="0">
+            <a:pPr eaLnBrk="0" indent="0" marL="0">
               <a:spcAft>
                 <a:spcPts val="600"/>
               </a:spcAft>
@@ -6130,7 +6130,7 @@
           <a:bodyPr wrap="square" lIns="0" tIns="0" rIns="0" bIns="0" rtlCol="0" anchor="ctr"/>
           <a:lstStyle/>
           <a:p>
-            <a:pPr indent="0" marL="0">
+            <a:pPr eaLnBrk="0" indent="0" marL="0">
               <a:spcAft>
                 <a:spcPts val="600"/>
               </a:spcAft>
@@ -6180,7 +6180,7 @@
           <a:bodyPr wrap="square" lIns="177800" tIns="0" rIns="177800" bIns="0" rtlCol="0" anchor="ctr"/>
           <a:lstStyle/>
           <a:p>
-            <a:pPr algn="l" indent="0" marL="0">
+            <a:pPr eaLnBrk="0" algn="l" indent="0" marL="0">
               <a:buNone/>
             </a:pPr>
             <a:r>
@@ -6219,7 +6219,7 @@
           <a:bodyPr wrap="square" lIns="0" tIns="0" rIns="0" bIns="0" rtlCol="0" anchor="t"/>
           <a:lstStyle/>
           <a:p>
-            <a:pPr algn="l" indent="0" marL="0">
+            <a:pPr eaLnBrk="0" algn="l" indent="0" marL="0">
               <a:buNone/>
             </a:pPr>
             <a:r>
@@ -6266,7 +6266,7 @@
           <a:bodyPr wrap="square" lIns="177800" tIns="0" rIns="177800" bIns="0" rtlCol="0" anchor="ctr"/>
           <a:lstStyle/>
           <a:p>
-            <a:pPr algn="l" indent="0" marL="0">
+            <a:pPr eaLnBrk="0" algn="l" indent="0" marL="0">
               <a:buNone/>
             </a:pPr>
             <a:r>
@@ -6305,7 +6305,7 @@
           <a:bodyPr wrap="square" lIns="0" tIns="0" rIns="0" bIns="0" rtlCol="0" anchor="t"/>
           <a:lstStyle/>
           <a:p>
-            <a:pPr algn="l" indent="0" marL="0">
+            <a:pPr eaLnBrk="0" algn="l" indent="0" marL="0">
               <a:buNone/>
             </a:pPr>
             <a:r>
@@ -6362,7 +6362,7 @@
             </a:lvl1pPr>
           </a:lstStyle>
           <a:p>
-            <a:pPr algn="r"/>
+            <a:pPr eaLnBrk="0" algn="r"/>
             <a:fld id="{F7021451-1387-4CA6-816F-3879F97B5CBC}" type="slidenum">
               <a:rPr b="0" lang="en-US"/>
               <a:t>6</a:t>
@@ -6419,7 +6419,7 @@
           <a:bodyPr wrap="square" lIns="0" tIns="0" rIns="0" bIns="0" rtlCol="0" anchor="ctr"/>
           <a:lstStyle/>
           <a:p>
-            <a:pPr algn="l" indent="0" marL="0">
+            <a:pPr eaLnBrk="0" algn="l" indent="0" marL="0">
               <a:buNone/>
             </a:pPr>
             <a:r>
@@ -6458,7 +6458,7 @@
           <a:bodyPr wrap="square" lIns="0" tIns="0" rIns="0" bIns="0" rtlCol="0" anchor="ctr"/>
           <a:lstStyle/>
           <a:p>
-            <a:pPr algn="l" indent="0" marL="0">
+            <a:pPr eaLnBrk="0" algn="l" indent="0" marL="0">
               <a:buNone/>
             </a:pPr>
             <a:r>
@@ -6524,7 +6524,7 @@
           <a:bodyPr wrap="square" lIns="0" tIns="0" rIns="0" bIns="0" rtlCol="0" anchor="ctr"/>
           <a:lstStyle/>
           <a:p>
-            <a:pPr indent="0" marL="0">
+            <a:pPr eaLnBrk="0" indent="0" marL="0">
               <a:spcAft>
                 <a:spcPts val="600"/>
               </a:spcAft>
@@ -6544,7 +6544,7 @@
             <a:endParaRPr lang="ko-KR" sz="3000" dirty="0"/>
           </a:p>
           <a:p>
-            <a:pPr indent="0" marL="0">
+            <a:pPr eaLnBrk="0" indent="0" marL="0">
               <a:spcAft>
                 <a:spcPts val="600"/>
               </a:spcAft>
@@ -6564,7 +6564,7 @@
             <a:endParaRPr lang="ko-KR" sz="3000" dirty="0"/>
           </a:p>
           <a:p>
-            <a:pPr indent="0" marL="0">
+            <a:pPr eaLnBrk="0" indent="0" marL="0">
               <a:spcAft>
                 <a:spcPts val="600"/>
               </a:spcAft>
@@ -6584,7 +6584,7 @@
             <a:endParaRPr lang="ko-KR" sz="3000" dirty="0"/>
           </a:p>
           <a:p>
-            <a:pPr indent="0" marL="0">
+            <a:pPr eaLnBrk="0" indent="0" marL="0">
               <a:spcAft>
                 <a:spcPts val="600"/>
               </a:spcAft>
@@ -6632,7 +6632,7 @@
           <a:bodyPr wrap="square" lIns="0" tIns="0" rIns="0" bIns="0" rtlCol="0" anchor="ctr"/>
           <a:lstStyle/>
           <a:p>
-            <a:pPr algn="ctr" indent="0" marL="0">
+            <a:pPr eaLnBrk="0" algn="ctr" indent="0" marL="0">
               <a:buNone/>
             </a:pPr>
             <a:r>
@@ -6671,7 +6671,7 @@
           <a:bodyPr wrap="square" lIns="0" tIns="0" rIns="0" bIns="0" rtlCol="0" anchor="t"/>
           <a:lstStyle/>
           <a:p>
-            <a:pPr algn="l" indent="0" marL="0">
+            <a:pPr eaLnBrk="0" algn="l" indent="0" marL="0">
               <a:buNone/>
             </a:pPr>
             <a:r>
@@ -6716,7 +6716,7 @@
           <a:bodyPr wrap="square" lIns="0" tIns="0" rIns="0" bIns="0" rtlCol="0" anchor="ctr"/>
           <a:lstStyle/>
           <a:p>
-            <a:pPr algn="ctr" indent="0" marL="0">
+            <a:pPr eaLnBrk="0" algn="ctr" indent="0" marL="0">
               <a:buNone/>
             </a:pPr>
             <a:r>
@@ -6755,7 +6755,7 @@
           <a:bodyPr wrap="square" lIns="0" tIns="0" rIns="0" bIns="0" rtlCol="0" anchor="t"/>
           <a:lstStyle/>
           <a:p>
-            <a:pPr algn="l" indent="0" marL="0">
+            <a:pPr eaLnBrk="0" algn="l" indent="0" marL="0">
               <a:buNone/>
             </a:pPr>
             <a:r>
@@ -6800,7 +6800,7 @@
           <a:bodyPr wrap="square" lIns="0" tIns="0" rIns="0" bIns="0" rtlCol="0" anchor="ctr"/>
           <a:lstStyle/>
           <a:p>
-            <a:pPr algn="ctr" indent="0" marL="0">
+            <a:pPr eaLnBrk="0" algn="ctr" indent="0" marL="0">
               <a:buNone/>
             </a:pPr>
             <a:r>
@@ -6839,7 +6839,7 @@
           <a:bodyPr wrap="square" lIns="0" tIns="0" rIns="0" bIns="0" rtlCol="0" anchor="t"/>
           <a:lstStyle/>
           <a:p>
-            <a:pPr algn="l" indent="0" marL="0">
+            <a:pPr eaLnBrk="0" algn="l" indent="0" marL="0">
               <a:buNone/>
             </a:pPr>
             <a:r>
@@ -6884,7 +6884,7 @@
           <a:bodyPr wrap="square" lIns="0" tIns="0" rIns="0" bIns="0" rtlCol="0" anchor="ctr"/>
           <a:lstStyle/>
           <a:p>
-            <a:pPr algn="ctr" indent="0" marL="0">
+            <a:pPr eaLnBrk="0" algn="ctr" indent="0" marL="0">
               <a:buNone/>
             </a:pPr>
             <a:r>
@@ -6923,7 +6923,7 @@
           <a:bodyPr wrap="square" lIns="0" tIns="0" rIns="0" bIns="0" rtlCol="0" anchor="t"/>
           <a:lstStyle/>
           <a:p>
-            <a:pPr algn="l" indent="0" marL="0">
+            <a:pPr eaLnBrk="0" algn="l" indent="0" marL="0">
               <a:buNone/>
             </a:pPr>
             <a:r>
@@ -6980,7 +6980,7 @@
             </a:lvl1pPr>
           </a:lstStyle>
           <a:p>
-            <a:pPr algn="r"/>
+            <a:pPr eaLnBrk="0" algn="r"/>
             <a:fld id="{F7021451-1387-4CA6-816F-3879F97B5CBC}" type="slidenum">
               <a:rPr b="0" lang="en-US"/>
               <a:t>7</a:t>
@@ -7037,7 +7037,7 @@
           <a:bodyPr wrap="square" lIns="0" tIns="0" rIns="0" bIns="0" rtlCol="0" anchor="ctr"/>
           <a:lstStyle/>
           <a:p>
-            <a:pPr algn="l" indent="0" marL="0">
+            <a:pPr eaLnBrk="0" algn="l" indent="0" marL="0">
               <a:buNone/>
             </a:pPr>
             <a:r>
@@ -7103,7 +7103,7 @@
           <a:bodyPr wrap="square" lIns="0" tIns="0" rIns="0" bIns="0" rtlCol="0" anchor="ctr"/>
           <a:lstStyle/>
           <a:p>
-            <a:pPr indent="0" marL="0">
+            <a:pPr eaLnBrk="0" indent="0" marL="0">
               <a:spcAft>
                 <a:spcPts val="600"/>
               </a:spcAft>
@@ -7153,7 +7153,7 @@
           <a:bodyPr wrap="square" lIns="177800" tIns="0" rIns="177800" bIns="0" rtlCol="0" anchor="ctr"/>
           <a:lstStyle/>
           <a:p>
-            <a:pPr algn="l" indent="0" marL="0">
+            <a:pPr eaLnBrk="0" algn="l" indent="0" marL="0">
               <a:buNone/>
             </a:pPr>
             <a:r>
@@ -7200,7 +7200,7 @@
           <a:bodyPr wrap="square" lIns="177800" tIns="0" rIns="177800" bIns="0" rtlCol="0" anchor="ctr"/>
           <a:lstStyle/>
           <a:p>
-            <a:pPr algn="l" indent="0" marL="0">
+            <a:pPr eaLnBrk="0" algn="l" indent="0" marL="0">
               <a:buNone/>
             </a:pPr>
             <a:r>
@@ -7239,7 +7239,7 @@
           <a:bodyPr wrap="square" lIns="0" tIns="0" rIns="0" bIns="0" rtlCol="0" anchor="t"/>
           <a:lstStyle/>
           <a:p>
-            <a:pPr algn="l" indent="0" marL="0">
+            <a:pPr eaLnBrk="0" algn="l" indent="0" marL="0">
               <a:buNone/>
             </a:pPr>
             <a:r>
@@ -7278,7 +7278,7 @@
           <a:bodyPr wrap="square" lIns="0" tIns="0" rIns="0" bIns="0" rtlCol="0" anchor="ctr"/>
           <a:lstStyle/>
           <a:p>
-            <a:pPr algn="l" indent="0" marL="0">
+            <a:pPr eaLnBrk="0" algn="l" indent="0" marL="0">
               <a:buNone/>
             </a:pPr>
             <a:r>
@@ -7317,7 +7317,7 @@
           <a:bodyPr wrap="square" lIns="0" tIns="0" rIns="0" bIns="0" rtlCol="0" anchor="ctr"/>
           <a:lstStyle/>
           <a:p>
-            <a:pPr algn="l" indent="0" marL="0">
+            <a:pPr eaLnBrk="0" algn="l" indent="0" marL="0">
               <a:buNone/>
             </a:pPr>
             <a:r>
@@ -7356,7 +7356,7 @@
           <a:bodyPr wrap="square" lIns="0" tIns="0" rIns="0" bIns="0" rtlCol="0" anchor="ctr"/>
           <a:lstStyle/>
           <a:p>
-            <a:pPr algn="l" indent="0" marL="0">
+            <a:pPr eaLnBrk="0" algn="l" indent="0" marL="0">
               <a:buNone/>
             </a:pPr>
             <a:r>
@@ -7413,7 +7413,7 @@
             </a:lvl1pPr>
           </a:lstStyle>
           <a:p>
-            <a:pPr algn="r"/>
+            <a:pPr eaLnBrk="0" algn="r"/>
             <a:fld id="{F7021451-1387-4CA6-816F-3879F97B5CBC}" type="slidenum">
               <a:rPr b="0" lang="en-US"/>
               <a:t>8</a:t>

--- a/dist/초3/음악·미술/음악표현/초3_음악·미술_음악표현_01_박과리듬_학생용.pptx
+++ b/dist/초3/음악·미술/음악표현/초3_음악·미술_음악표현_01_박과리듬_학생용.pptx
@@ -114,30 +114,30 @@
   <p:extLst>
     <p:ext uri="{521415D9-36F7-43E2-AB2F-B90AF26B5E84}">
       <p14:sectionLst xmlns:p14="http://schemas.microsoft.com/office/powerpoint/2010/main">
-        <p14:section name="도입" id="{e2cf8156-d542-a746-d1e4-44cb53aa78c0}">
+        <p14:section name="도입" id="{01bc11f7-db87-3da8-6bfa-f36d3b1b80d4}">
           <p14:sldIdLst>
             <p14:sldId id="256"/>
           </p14:sldIdLst>
         </p14:section>
-        <p14:section name="개념" id="{01b9a3f3-48b6-53dc-3688-67e5e3b20350}">
+        <p14:section name="개념" id="{f31c8ee5-9c88-8bee-de51-d5bb48e73012}">
           <p14:sldIdLst>
             <p14:sldId id="257"/>
             <p14:sldId id="258"/>
             <p14:sldId id="259"/>
           </p14:sldIdLst>
         </p14:section>
-        <p14:section name="연습" id="{48e6d991-7c2b-9ca4-ccc5-5f1ff73f9a0d}">
+        <p14:section name="연습" id="{b121227b-f59c-74b3-6e59-3b1a7f585fa4}">
           <p14:sldIdLst>
             <p14:sldId id="260"/>
             <p14:sldId id="261"/>
           </p14:sldIdLst>
         </p14:section>
-        <p14:section name="확인" id="{5b48738d-a9b0-4ab5-22b9-bf6a7986e998}">
+        <p14:section name="확인" id="{708990ff-5246-809d-6272-82ac97224660}">
           <p14:sldIdLst>
             <p14:sldId id="262"/>
           </p14:sldIdLst>
         </p14:section>
-        <p14:section name="정리" id="{f4587eed-a342-2f39-60b0-fa4b8bf7808a}">
+        <p14:section name="정리" id="{41b35c88-4b3e-0da3-8083-663dfa55cdde}">
           <p14:sldIdLst>
             <p14:sldId id="263"/>
           </p14:sldIdLst>
@@ -2315,7 +2315,7 @@
           </p:nvPr>
         </p:nvGraphicFramePr>
         <p:xfrm>
-          <a:off x="7680960" y="1615440"/>
+          <a:off x="7680960" y="1630680"/>
           <a:ext cx="3931920" cy="914400"/>
         </p:xfrm>
         <a:graphic>
@@ -2328,7 +2328,7 @@
                 <a:gridCol w="982980"/>
                 <a:gridCol w="982980"/>
               </a:tblGrid>
-              <a:tr h="487680">
+              <a:tr h="472440">
                 <a:tc>
                   <a:txBody>
                     <a:bodyPr/>
@@ -2602,7 +2602,7 @@
                   </a:tcPr>
                 </a:tc>
               </a:tr>
-              <a:tr h="487680">
+              <a:tr h="472440">
                 <a:tc>
                   <a:txBody>
                     <a:bodyPr/>
@@ -4053,7 +4053,7 @@
           </p:nvPr>
         </p:nvGraphicFramePr>
         <p:xfrm>
-          <a:off x="2802636" y="3078480"/>
+          <a:off x="2802636" y="3093720"/>
           <a:ext cx="6583680" cy="914400"/>
         </p:xfrm>
         <a:graphic>
@@ -4066,7 +4066,7 @@
                 <a:gridCol w="1645920"/>
                 <a:gridCol w="1645920"/>
               </a:tblGrid>
-              <a:tr h="487680">
+              <a:tr h="472440">
                 <a:tc>
                   <a:txBody>
                     <a:bodyPr/>
@@ -4340,7 +4340,7 @@
                   </a:tcPr>
                 </a:tc>
               </a:tr>
-              <a:tr h="487680">
+              <a:tr h="472440">
                 <a:tc>
                   <a:txBody>
                     <a:bodyPr/>
@@ -4902,20 +4902,20 @@
           </p:nvPr>
         </p:nvGraphicFramePr>
         <p:xfrm>
-          <a:off x="1344168" y="2225040"/>
-          <a:ext cx="4206240" cy="914400"/>
+          <a:off x="1344168" y="2232660"/>
+          <a:ext cx="5486400" cy="914400"/>
         </p:xfrm>
         <a:graphic>
           <a:graphicData uri="http://schemas.openxmlformats.org/drawingml/2006/table">
             <a:tbl>
               <a:tblPr/>
               <a:tblGrid>
-                <a:gridCol w="1051560"/>
-                <a:gridCol w="1051560"/>
-                <a:gridCol w="1051560"/>
-                <a:gridCol w="1051560"/>
+                <a:gridCol w="1371600"/>
+                <a:gridCol w="1371600"/>
+                <a:gridCol w="1371600"/>
+                <a:gridCol w="1371600"/>
               </a:tblGrid>
-              <a:tr h="487680">
+              <a:tr h="472440">
                 <a:tc>
                   <a:txBody>
                     <a:bodyPr/>
@@ -5255,20 +5255,20 @@
           </p:nvPr>
         </p:nvGraphicFramePr>
         <p:xfrm>
-          <a:off x="1344168" y="3322320"/>
-          <a:ext cx="4206240" cy="914400"/>
+          <a:off x="1344168" y="3329940"/>
+          <a:ext cx="5486400" cy="914400"/>
         </p:xfrm>
         <a:graphic>
           <a:graphicData uri="http://schemas.openxmlformats.org/drawingml/2006/table">
             <a:tbl>
               <a:tblPr/>
               <a:tblGrid>
-                <a:gridCol w="1051560"/>
-                <a:gridCol w="1051560"/>
-                <a:gridCol w="1051560"/>
-                <a:gridCol w="1051560"/>
+                <a:gridCol w="1371600"/>
+                <a:gridCol w="1371600"/>
+                <a:gridCol w="1371600"/>
+                <a:gridCol w="1371600"/>
               </a:tblGrid>
-              <a:tr h="487680">
+              <a:tr h="472440">
                 <a:tc>
                   <a:txBody>
                     <a:bodyPr/>
@@ -5608,20 +5608,20 @@
           </p:nvPr>
         </p:nvGraphicFramePr>
         <p:xfrm>
-          <a:off x="1344168" y="4419600"/>
-          <a:ext cx="4206240" cy="914400"/>
+          <a:off x="1344168" y="4427220"/>
+          <a:ext cx="5486400" cy="914400"/>
         </p:xfrm>
         <a:graphic>
           <a:graphicData uri="http://schemas.openxmlformats.org/drawingml/2006/table">
             <a:tbl>
               <a:tblPr/>
               <a:tblGrid>
-                <a:gridCol w="1051560"/>
-                <a:gridCol w="1051560"/>
-                <a:gridCol w="1051560"/>
-                <a:gridCol w="1051560"/>
+                <a:gridCol w="1371600"/>
+                <a:gridCol w="1371600"/>
+                <a:gridCol w="1371600"/>
+                <a:gridCol w="1371600"/>
               </a:tblGrid>
-              <a:tr h="487680">
+              <a:tr h="472440">
                 <a:tc>
                   <a:txBody>
                     <a:bodyPr/>
